--- a/Section 504/t2-lesson4-bellwork-504-ANSWER-KEY.pptx
+++ b/Section 504/t2-lesson4-bellwork-504-ANSWER-KEY.pptx
@@ -987,6 +987,40 @@
           </a:p>
         </p:txBody>
       </p:sp>
+      <p:sp>
+        <p:nvSpPr>
+          <p:cNvPr id="8" name="Slide Number 8"/>
+          <p:cNvSpPr txBox="1"/>
+          <p:nvPr/>
+        </p:nvSpPr>
+        <p:spPr>
+          <a:xfrm>
+            <a:off x="11277295" y="6611112"/>
+            <a:ext cx="685800" cy="201168"/>
+          </a:xfrm>
+          <a:prstGeom prst="rect">
+            <a:avLst/>
+          </a:prstGeom>
+          <a:noFill/>
+        </p:spPr>
+        <p:txBody>
+          <a:bodyPr wrap="none" lIns="0" tIns="0" rIns="0" bIns="0" anchor="b">
+            <a:noAutofit/>
+          </a:bodyPr>
+          <a:lstStyle/>
+          <a:p>
+            <a:pPr algn="r"/>
+            <a:fld id="{5C1A6E0B-3B1F-4D5E-9C7A-2F4B8D6E1A90}" type="slidenum">
+              <a:rPr lang="en-US" sz="1200" dirty="0">
+                <a:solidFill>
+                  <a:srgbClr val="5F6272"/>
+                </a:solidFill>
+              </a:rPr>
+              <a:t>1</a:t>
+            </a:fld>
+          </a:p>
+        </p:txBody>
+      </p:sp>
     </p:spTree>
   </p:cSld>
   <p:clrMapOvr>
@@ -1620,6 +1654,40 @@
           </a:p>
         </p:txBody>
       </p:sp>
+      <p:sp>
+        <p:nvSpPr>
+          <p:cNvPr id="16" name="Slide Number 16"/>
+          <p:cNvSpPr txBox="1"/>
+          <p:nvPr/>
+        </p:nvSpPr>
+        <p:spPr>
+          <a:xfrm>
+            <a:off x="11277295" y="6611112"/>
+            <a:ext cx="685800" cy="201168"/>
+          </a:xfrm>
+          <a:prstGeom prst="rect">
+            <a:avLst/>
+          </a:prstGeom>
+          <a:noFill/>
+        </p:spPr>
+        <p:txBody>
+          <a:bodyPr wrap="none" lIns="0" tIns="0" rIns="0" bIns="0" anchor="b">
+            <a:noAutofit/>
+          </a:bodyPr>
+          <a:lstStyle/>
+          <a:p>
+            <a:pPr algn="r"/>
+            <a:fld id="{5C1A6E0B-3B1F-4D5E-9C7A-2F4B8D6E1A90}" type="slidenum">
+              <a:rPr lang="en-US" sz="1200" dirty="0">
+                <a:solidFill>
+                  <a:srgbClr val="5F6272"/>
+                </a:solidFill>
+              </a:rPr>
+              <a:t>2</a:t>
+            </a:fld>
+          </a:p>
+        </p:txBody>
+      </p:sp>
     </p:spTree>
   </p:cSld>
   <p:clrMapOvr>
@@ -2253,6 +2321,40 @@
           </a:p>
         </p:txBody>
       </p:sp>
+      <p:sp>
+        <p:nvSpPr>
+          <p:cNvPr id="16" name="Slide Number 16"/>
+          <p:cNvSpPr txBox="1"/>
+          <p:nvPr/>
+        </p:nvSpPr>
+        <p:spPr>
+          <a:xfrm>
+            <a:off x="11277295" y="6611112"/>
+            <a:ext cx="685800" cy="201168"/>
+          </a:xfrm>
+          <a:prstGeom prst="rect">
+            <a:avLst/>
+          </a:prstGeom>
+          <a:noFill/>
+        </p:spPr>
+        <p:txBody>
+          <a:bodyPr wrap="none" lIns="0" tIns="0" rIns="0" bIns="0" anchor="b">
+            <a:noAutofit/>
+          </a:bodyPr>
+          <a:lstStyle/>
+          <a:p>
+            <a:pPr algn="r"/>
+            <a:fld id="{5C1A6E0B-3B1F-4D5E-9C7A-2F4B8D6E1A90}" type="slidenum">
+              <a:rPr lang="en-US" sz="1200" dirty="0">
+                <a:solidFill>
+                  <a:srgbClr val="5F6272"/>
+                </a:solidFill>
+              </a:rPr>
+              <a:t>3</a:t>
+            </a:fld>
+          </a:p>
+        </p:txBody>
+      </p:sp>
     </p:spTree>
   </p:cSld>
   <p:clrMapOvr>
@@ -2886,6 +2988,40 @@
           </a:p>
         </p:txBody>
       </p:sp>
+      <p:sp>
+        <p:nvSpPr>
+          <p:cNvPr id="16" name="Slide Number 16"/>
+          <p:cNvSpPr txBox="1"/>
+          <p:nvPr/>
+        </p:nvSpPr>
+        <p:spPr>
+          <a:xfrm>
+            <a:off x="11277295" y="6611112"/>
+            <a:ext cx="685800" cy="201168"/>
+          </a:xfrm>
+          <a:prstGeom prst="rect">
+            <a:avLst/>
+          </a:prstGeom>
+          <a:noFill/>
+        </p:spPr>
+        <p:txBody>
+          <a:bodyPr wrap="none" lIns="0" tIns="0" rIns="0" bIns="0" anchor="b">
+            <a:noAutofit/>
+          </a:bodyPr>
+          <a:lstStyle/>
+          <a:p>
+            <a:pPr algn="r"/>
+            <a:fld id="{5C1A6E0B-3B1F-4D5E-9C7A-2F4B8D6E1A90}" type="slidenum">
+              <a:rPr lang="en-US" sz="1200" dirty="0">
+                <a:solidFill>
+                  <a:srgbClr val="5F6272"/>
+                </a:solidFill>
+              </a:rPr>
+              <a:t>4</a:t>
+            </a:fld>
+          </a:p>
+        </p:txBody>
+      </p:sp>
     </p:spTree>
   </p:cSld>
   <p:clrMapOvr>
@@ -3516,6 +3652,40 @@
               <a:t xml:space="preserve">Topic 2 Lesson 4 Bell Work · Section 504 Version · Answer Key (teacher copy)</a:t>
             </a:r>
             <a:endParaRPr lang="en-US" sz="1125" dirty="0"/>
+          </a:p>
+        </p:txBody>
+      </p:sp>
+      <p:sp>
+        <p:nvSpPr>
+          <p:cNvPr id="16" name="Slide Number 16"/>
+          <p:cNvSpPr txBox="1"/>
+          <p:nvPr/>
+        </p:nvSpPr>
+        <p:spPr>
+          <a:xfrm>
+            <a:off x="11277295" y="6611112"/>
+            <a:ext cx="685800" cy="201168"/>
+          </a:xfrm>
+          <a:prstGeom prst="rect">
+            <a:avLst/>
+          </a:prstGeom>
+          <a:noFill/>
+        </p:spPr>
+        <p:txBody>
+          <a:bodyPr wrap="none" lIns="0" tIns="0" rIns="0" bIns="0" anchor="b">
+            <a:noAutofit/>
+          </a:bodyPr>
+          <a:lstStyle/>
+          <a:p>
+            <a:pPr algn="r"/>
+            <a:fld id="{5C1A6E0B-3B1F-4D5E-9C7A-2F4B8D6E1A90}" type="slidenum">
+              <a:rPr lang="en-US" sz="1200" dirty="0">
+                <a:solidFill>
+                  <a:srgbClr val="5F6272"/>
+                </a:solidFill>
+              </a:rPr>
+              <a:t>5</a:t>
+            </a:fld>
           </a:p>
         </p:txBody>
       </p:sp>

--- a/Section 504/t2-lesson4-bellwork-504-ANSWER-KEY.pptx
+++ b/Section 504/t2-lesson4-bellwork-504-ANSWER-KEY.pptx
@@ -2104,7 +2104,7 @@
         <p:spPr>
           <a:xfrm>
             <a:off x="685800" y="2457450"/>
-            <a:ext cx="2164019" cy="1024128"/>
+            <a:ext cx="2164019" cy="1572768"/>
           </a:xfrm>
           <a:prstGeom prst="rect">
             <a:avLst/>
@@ -2143,7 +2143,7 @@
                 <a:latin typeface="Segoe UI"/>
                 <a:cs typeface="Segoe UI"/>
               </a:rPr>
-              <a:t xml:space="preserve"> · SE p. 320</a:t>
+              <a:t xml:space="preserve"> · SE p. 325</a:t>
             </a:r>
             <a:endParaRPr lang="en-US" sz="1800" dirty="0"/>
           </a:p>
@@ -2158,7 +2158,7 @@
         <p:spPr>
           <a:xfrm>
             <a:off x="2849819" y="2457450"/>
-            <a:ext cx="4328038" cy="1024128"/>
+            <a:ext cx="4328038" cy="1572768"/>
           </a:xfrm>
           <a:prstGeom prst="rect">
             <a:avLst/>
@@ -2187,7 +2187,7 @@
                 <a:latin typeface="Segoe UI"/>
                 <a:cs typeface="Segoe UI"/>
               </a:rPr>
-              <a:t xml:space="preserve">The ratio of 9th-graders to 10th-graders is 1 : 1. What is the slope of this relationship?</a:t>
+              <a:t xml:space="preserve">Function p passes through (0, 1) and (4, 4). Which function has a greater rate of change than function p?</a:t>
             </a:r>
             <a:endParaRPr lang="en-US" sz="1800" dirty="0"/>
           </a:p>
@@ -2202,7 +2202,7 @@
         <p:spPr>
           <a:xfrm>
             <a:off x="7177857" y="2457450"/>
-            <a:ext cx="4328038" cy="1024128"/>
+            <a:ext cx="4328038" cy="1572768"/>
           </a:xfrm>
           <a:prstGeom prst="rect">
             <a:avLst/>
@@ -2231,7 +2231,7 @@
                 <a:latin typeface="Segoe UI"/>
                 <a:cs typeface="Segoe UI"/>
               </a:rPr>
-              <a:t xml:space="preserve">1</a:t>
+              <a:t xml:space="preserve">y = x − 2</a:t>
             </a:r>
             <a:br>
               <a:rPr lang="en-US" sz="1800" dirty="0">
@@ -2250,7 +2250,7 @@
                 <a:latin typeface="Segoe UI"/>
                 <a:cs typeface="Segoe UI"/>
               </a:rPr>
-              <a:t xml:space="preserve">Equal numbers of each grade: y = x, slope 1.</a:t>
+              <a:t xml:space="preserve">p has slope (4 − 1) ÷ 4 = ¾ = 0.75. y = x − 2 has slope 1, which is greater. (3x − 4y = 8 is y = ¾x − 2: equal, not greater.)</a:t>
             </a:r>
             <a:endParaRPr lang="en-US" sz="1800" dirty="0"/>
           </a:p>
@@ -2264,7 +2264,7 @@
         </p:nvCxnSpPr>
         <p:spPr>
           <a:xfrm>
-            <a:off x="685800" y="3481578"/>
+            <a:off x="685800" y="4030218"/>
             <a:ext cx="10820095" cy="0"/>
           </a:xfrm>
           <a:prstGeom prst="line">
@@ -3438,7 +3438,7 @@
         <p:spPr>
           <a:xfrm>
             <a:off x="685800" y="2731770"/>
-            <a:ext cx="2164019" cy="1024128"/>
+            <a:ext cx="2164019" cy="1298448"/>
           </a:xfrm>
           <a:prstGeom prst="rect">
             <a:avLst/>
@@ -3477,7 +3477,7 @@
                 <a:latin typeface="Segoe UI"/>
                 <a:cs typeface="Segoe UI"/>
               </a:rPr>
-              <a:t xml:space="preserve"> · SE p. 324</a:t>
+              <a:t xml:space="preserve"> · SE p. 325</a:t>
             </a:r>
             <a:endParaRPr lang="en-US" sz="1800" dirty="0"/>
           </a:p>
@@ -3492,7 +3492,7 @@
         <p:spPr>
           <a:xfrm>
             <a:off x="2849819" y="2731770"/>
-            <a:ext cx="4328038" cy="1024128"/>
+            <a:ext cx="4328038" cy="1298448"/>
           </a:xfrm>
           <a:prstGeom prst="rect">
             <a:avLst/>
@@ -3521,7 +3521,7 @@
                 <a:latin typeface="Segoe UI"/>
                 <a:cs typeface="Segoe UI"/>
               </a:rPr>
-              <a:t xml:space="preserve">Miguel started with $0 and had $80 after 4 months. How much did he save each month?</a:t>
+              <a:t xml:space="preserve">A 200-gallon tank drains 10 gallons each minute: w(t) = 200 − 10t. What is the range of the function for this situation?</a:t>
             </a:r>
             <a:endParaRPr lang="en-US" sz="1800" dirty="0"/>
           </a:p>
@@ -3536,7 +3536,7 @@
         <p:spPr>
           <a:xfrm>
             <a:off x="7177857" y="2731770"/>
-            <a:ext cx="4328038" cy="1024128"/>
+            <a:ext cx="4328038" cy="1298448"/>
           </a:xfrm>
           <a:prstGeom prst="rect">
             <a:avLst/>
@@ -3565,7 +3565,7 @@
                 <a:latin typeface="Segoe UI"/>
                 <a:cs typeface="Segoe UI"/>
               </a:rPr>
-              <a:t xml:space="preserve">$20</a:t>
+              <a:t xml:space="preserve">0 ≤ w(t) ≤ 200</a:t>
             </a:r>
             <a:br>
               <a:rPr lang="en-US" sz="1800" dirty="0">
@@ -3584,7 +3584,7 @@
                 <a:latin typeface="Segoe UI"/>
                 <a:cs typeface="Segoe UI"/>
               </a:rPr>
-              <a:t xml:space="preserve">80 ÷ 4 = 20 dollars per month.</a:t>
+              <a:t xml:space="preserve">Range = the outputs, the gallons left: 200 at the start, down to 0 when t = 20.</a:t>
             </a:r>
             <a:endParaRPr lang="en-US" sz="1800" dirty="0"/>
           </a:p>
@@ -3598,7 +3598,7 @@
         </p:nvCxnSpPr>
         <p:spPr>
           <a:xfrm>
-            <a:off x="685800" y="3755898"/>
+            <a:off x="685800" y="4030218"/>
             <a:ext cx="10820095" cy="0"/>
           </a:xfrm>
           <a:prstGeom prst="line">
